--- a/slides/Module_11_Product_First.pptx
+++ b/slides/Module_11_Product_First.pptx
@@ -14000,7 +14000,7 @@
         </p:nvSpPr>
         <p:spPr>
           <a:xfrm>
-            <a:off x="365760" y="822960"/>
+            <a:off x="365760" y="804672"/>
             <a:ext cx="8412480" cy="274320"/>
           </a:xfrm>
           <a:prstGeom prst="rect">
@@ -14017,14 +14017,14 @@
               <a:buNone/>
             </a:pPr>
             <a:r>
-              <a:rPr lang="en-US" sz="1200" i="1" dirty="0">
+              <a:rPr lang="en-US" sz="1100" i="1" dirty="0">
                 <a:solidFill>
                   <a:srgbClr val="7A90A8"/>
                 </a:solidFill>
               </a:rPr>
-              <a:t>Agents make hygiene and improvement economically viable at scale. Tasks that would take a sprint can now run overnight.</a:t>
-            </a:r>
-            <a:endParaRPr lang="en-US" sz="1200" dirty="0"/>
+              <a:t>Agents make hygiene economically viable at scale — and are available for review and education continuously, not just when a senior developer has spare time.</a:t>
+            </a:r>
+            <a:endParaRPr lang="en-US" sz="1100" dirty="0"/>
           </a:p>
         </p:txBody>
       </p:sp>
@@ -14037,7 +14037,7 @@
         <p:spPr>
           <a:xfrm>
             <a:off x="320040" y="1170432"/>
-            <a:ext cx="4160520" cy="1792224"/>
+            <a:ext cx="4160520" cy="1133856"/>
           </a:xfrm>
           <a:prstGeom prst="rect">
             <a:avLst/>
@@ -14064,7 +14064,7 @@
         <p:spPr>
           <a:xfrm>
             <a:off x="320040" y="1170432"/>
-            <a:ext cx="4160520" cy="402336"/>
+            <a:ext cx="54864" cy="1133856"/>
           </a:xfrm>
           <a:prstGeom prst="rect">
             <a:avLst/>
@@ -14083,31 +14083,31 @@
         </p:nvSpPr>
         <p:spPr>
           <a:xfrm>
-            <a:off x="429768" y="1170432"/>
-            <a:ext cx="3941064" cy="402336"/>
-          </a:xfrm>
-          <a:prstGeom prst="rect">
-            <a:avLst/>
-          </a:prstGeom>
-          <a:noFill/>
-          <a:ln/>
-        </p:spPr>
-        <p:txBody>
-          <a:bodyPr wrap="square" lIns="0" tIns="0" rIns="0" bIns="0" rtlCol="0" anchor="ctr"/>
-          <a:lstStyle/>
-          <a:p>
-            <a:pPr indent="0" marL="0">
-              <a:buNone/>
-            </a:pPr>
-            <a:r>
-              <a:rPr lang="en-US" sz="1300" b="1" dirty="0">
-                <a:solidFill>
-                  <a:srgbClr val="FFFFFF"/>
+            <a:off x="466344" y="1243584"/>
+            <a:ext cx="3922776" cy="274320"/>
+          </a:xfrm>
+          <a:prstGeom prst="rect">
+            <a:avLst/>
+          </a:prstGeom>
+          <a:noFill/>
+          <a:ln/>
+        </p:spPr>
+        <p:txBody>
+          <a:bodyPr wrap="square" lIns="0" tIns="0" rIns="0" bIns="0" rtlCol="0" anchor="ctr"/>
+          <a:lstStyle/>
+          <a:p>
+            <a:pPr indent="0" marL="0">
+              <a:buNone/>
+            </a:pPr>
+            <a:r>
+              <a:rPr lang="en-US" sz="1250" b="1" dirty="0">
+                <a:solidFill>
+                  <a:srgbClr val="1C3557"/>
                 </a:solidFill>
               </a:rPr>
               <a:t>Dependency Hygiene</a:t>
             </a:r>
-            <a:endParaRPr lang="en-US" sz="1300" dirty="0"/>
+            <a:endParaRPr lang="en-US" sz="1250" dirty="0"/>
           </a:p>
         </p:txBody>
       </p:sp>
@@ -14119,29 +14119,65 @@
         </p:nvSpPr>
         <p:spPr>
           <a:xfrm>
-            <a:off x="429768" y="1627632"/>
-            <a:ext cx="3941064" cy="237744"/>
-          </a:xfrm>
-          <a:prstGeom prst="rect">
-            <a:avLst/>
-          </a:prstGeom>
-          <a:noFill/>
-          <a:ln/>
-        </p:spPr>
-        <p:txBody>
-          <a:bodyPr wrap="square" lIns="0" tIns="0" rIns="0" bIns="0" rtlCol="0" anchor="ctr"/>
-          <a:lstStyle/>
-          <a:p>
-            <a:pPr indent="0" marL="0">
-              <a:buNone/>
-            </a:pPr>
-            <a:r>
-              <a:rPr lang="en-US" sz="1000" i="1" dirty="0">
+            <a:off x="466344" y="1554480"/>
+            <a:ext cx="3922776" cy="201168"/>
+          </a:xfrm>
+          <a:prstGeom prst="rect">
+            <a:avLst/>
+          </a:prstGeom>
+          <a:noFill/>
+          <a:ln/>
+        </p:spPr>
+        <p:txBody>
+          <a:bodyPr wrap="square" lIns="0" tIns="0" rIns="0" bIns="0" rtlCol="0" anchor="ctr"/>
+          <a:lstStyle/>
+          <a:p>
+            <a:pPr indent="0" marL="0">
+              <a:buNone/>
+            </a:pPr>
+            <a:r>
+              <a:rPr lang="en-US" sz="950" i="1" dirty="0">
                 <a:solidFill>
                   <a:srgbClr val="1C3557"/>
                 </a:solidFill>
               </a:rPr>
-              <a:t>▶ Weekly scheduled agent run</a:t>
+              <a:t>▶ Weekly scheduled</a:t>
+            </a:r>
+            <a:endParaRPr lang="en-US" sz="950" dirty="0"/>
+          </a:p>
+        </p:txBody>
+      </p:sp>
+      <p:sp>
+        <p:nvSpPr>
+          <p:cNvPr id="9" name="Text 7"/>
+          <p:cNvSpPr/>
+          <p:nvPr/>
+        </p:nvSpPr>
+        <p:spPr>
+          <a:xfrm>
+            <a:off x="466344" y="1755648"/>
+            <a:ext cx="3922776" cy="512064"/>
+          </a:xfrm>
+          <a:prstGeom prst="rect">
+            <a:avLst/>
+          </a:prstGeom>
+          <a:noFill/>
+          <a:ln/>
+        </p:spPr>
+        <p:txBody>
+          <a:bodyPr wrap="square" lIns="0" tIns="0" rIns="0" bIns="0" rtlCol="0" anchor="ctr"/>
+          <a:lstStyle/>
+          <a:p>
+            <a:pPr indent="0" marL="0">
+              <a:buNone/>
+            </a:pPr>
+            <a:r>
+              <a:rPr lang="en-US" sz="1000" dirty="0">
+                <a:solidFill>
+                  <a:srgbClr val="7A90A8"/>
+                </a:solidFill>
+              </a:rPr>
+              <a:t>Scan for outdated / vulnerable dependencies. Group by risk level. Open low-risk PRs automatically (Tier 1). Flag high-risk changes for human review.</a:t>
             </a:r>
             <a:endParaRPr lang="en-US" sz="1000" dirty="0"/>
           </a:p>
@@ -14149,216 +14185,14 @@
       </p:sp>
       <p:sp>
         <p:nvSpPr>
-          <p:cNvPr id="9" name="Text 7"/>
-          <p:cNvSpPr/>
-          <p:nvPr/>
-        </p:nvSpPr>
-        <p:spPr>
-          <a:xfrm>
-            <a:off x="429768" y="1883664"/>
-            <a:ext cx="3941064" cy="237744"/>
-          </a:xfrm>
-          <a:prstGeom prst="rect">
-            <a:avLst/>
-          </a:prstGeom>
-          <a:noFill/>
-          <a:ln/>
-        </p:spPr>
-        <p:txBody>
-          <a:bodyPr wrap="square" lIns="0" tIns="0" rIns="0" bIns="0" rtlCol="0" anchor="ctr"/>
-          <a:lstStyle/>
-          <a:p>
-            <a:pPr indent="0" marL="0">
-              <a:buNone/>
-            </a:pPr>
-            <a:r>
-              <a:rPr lang="en-US" sz="1050" dirty="0">
-                <a:solidFill>
-                  <a:srgbClr val="1E2D3D"/>
-                </a:solidFill>
-              </a:rPr>
-              <a:t>1. Scan for outdated / vulnerable dependencies</a:t>
-            </a:r>
-            <a:endParaRPr lang="en-US" sz="1050" dirty="0"/>
-          </a:p>
-        </p:txBody>
-      </p:sp>
-      <p:sp>
-        <p:nvSpPr>
-          <p:cNvPr id="10" name="Text 8"/>
-          <p:cNvSpPr/>
-          <p:nvPr/>
-        </p:nvSpPr>
-        <p:spPr>
-          <a:xfrm>
-            <a:off x="429768" y="2139696"/>
-            <a:ext cx="3941064" cy="237744"/>
-          </a:xfrm>
-          <a:prstGeom prst="rect">
-            <a:avLst/>
-          </a:prstGeom>
-          <a:noFill/>
-          <a:ln/>
-        </p:spPr>
-        <p:txBody>
-          <a:bodyPr wrap="square" lIns="0" tIns="0" rIns="0" bIns="0" rtlCol="0" anchor="ctr"/>
-          <a:lstStyle/>
-          <a:p>
-            <a:pPr indent="0" marL="0">
-              <a:buNone/>
-            </a:pPr>
-            <a:r>
-              <a:rPr lang="en-US" sz="1050" dirty="0">
-                <a:solidFill>
-                  <a:srgbClr val="1E2D3D"/>
-                </a:solidFill>
-              </a:rPr>
-              <a:t>2. Group changes by risk level</a:t>
-            </a:r>
-            <a:endParaRPr lang="en-US" sz="1050" dirty="0"/>
-          </a:p>
-        </p:txBody>
-      </p:sp>
-      <p:sp>
-        <p:nvSpPr>
-          <p:cNvPr id="11" name="Text 9"/>
-          <p:cNvSpPr/>
-          <p:nvPr/>
-        </p:nvSpPr>
-        <p:spPr>
-          <a:xfrm>
-            <a:off x="429768" y="2395728"/>
-            <a:ext cx="3941064" cy="237744"/>
-          </a:xfrm>
-          <a:prstGeom prst="rect">
-            <a:avLst/>
-          </a:prstGeom>
-          <a:noFill/>
-          <a:ln/>
-        </p:spPr>
-        <p:txBody>
-          <a:bodyPr wrap="square" lIns="0" tIns="0" rIns="0" bIns="0" rtlCol="0" anchor="ctr"/>
-          <a:lstStyle/>
-          <a:p>
-            <a:pPr indent="0" marL="0">
-              <a:buNone/>
-            </a:pPr>
-            <a:r>
-              <a:rPr lang="en-US" sz="1050" dirty="0">
-                <a:solidFill>
-                  <a:srgbClr val="1E2D3D"/>
-                </a:solidFill>
-              </a:rPr>
-              <a:t>3. Open low-risk PRs automatically (Tier 1)</a:t>
-            </a:r>
-            <a:endParaRPr lang="en-US" sz="1050" dirty="0"/>
-          </a:p>
-        </p:txBody>
-      </p:sp>
-      <p:sp>
-        <p:nvSpPr>
-          <p:cNvPr id="12" name="Text 10"/>
-          <p:cNvSpPr/>
-          <p:nvPr/>
-        </p:nvSpPr>
-        <p:spPr>
-          <a:xfrm>
-            <a:off x="429768" y="2651760"/>
-            <a:ext cx="3941064" cy="237744"/>
-          </a:xfrm>
-          <a:prstGeom prst="rect">
-            <a:avLst/>
-          </a:prstGeom>
-          <a:noFill/>
-          <a:ln/>
-        </p:spPr>
-        <p:txBody>
-          <a:bodyPr wrap="square" lIns="0" tIns="0" rIns="0" bIns="0" rtlCol="0" anchor="ctr"/>
-          <a:lstStyle/>
-          <a:p>
-            <a:pPr indent="0" marL="0">
-              <a:buNone/>
-            </a:pPr>
-            <a:r>
-              <a:rPr lang="en-US" sz="1050" dirty="0">
-                <a:solidFill>
-                  <a:srgbClr val="1E2D3D"/>
-                </a:solidFill>
-              </a:rPr>
-              <a:t>4. Flag high-risk changes for human review (Tier 2/3)</a:t>
-            </a:r>
-            <a:endParaRPr lang="en-US" sz="1050" dirty="0"/>
-          </a:p>
-        </p:txBody>
-      </p:sp>
-      <p:sp>
-        <p:nvSpPr>
-          <p:cNvPr id="13" name="Shape 11"/>
-          <p:cNvSpPr/>
-          <p:nvPr/>
-        </p:nvSpPr>
-        <p:spPr>
-          <a:xfrm>
-            <a:off x="411480" y="2688336"/>
-            <a:ext cx="3977640" cy="219456"/>
-          </a:xfrm>
-          <a:prstGeom prst="rect">
-            <a:avLst/>
-          </a:prstGeom>
-          <a:solidFill>
-            <a:srgbClr val="1C3557">
-              <a:alpha val="12000"/>
-            </a:srgbClr>
-          </a:solidFill>
-          <a:ln/>
-        </p:spPr>
-      </p:sp>
-      <p:sp>
-        <p:nvSpPr>
-          <p:cNvPr id="14" name="Text 12"/>
-          <p:cNvSpPr/>
-          <p:nvPr/>
-        </p:nvSpPr>
-        <p:spPr>
-          <a:xfrm>
-            <a:off x="457200" y="2688336"/>
-            <a:ext cx="3886200" cy="219456"/>
-          </a:xfrm>
-          <a:prstGeom prst="rect">
-            <a:avLst/>
-          </a:prstGeom>
-          <a:noFill/>
-          <a:ln/>
-        </p:spPr>
-        <p:txBody>
-          <a:bodyPr wrap="square" lIns="0" tIns="0" rIns="0" bIns="0" rtlCol="0" anchor="ctr"/>
-          <a:lstStyle/>
-          <a:p>
-            <a:pPr indent="0" marL="0">
-              <a:buNone/>
-            </a:pPr>
-            <a:r>
-              <a:rPr lang="en-US" sz="950" i="1" dirty="0">
-                <a:solidFill>
-                  <a:srgbClr val="1C3557"/>
-                </a:solidFill>
-              </a:rPr>
-              <a:t>Codebase stays current. Security debt doesn’t accumulate silently.</a:t>
-            </a:r>
-            <a:endParaRPr lang="en-US" sz="950" dirty="0"/>
-          </a:p>
-        </p:txBody>
-      </p:sp>
-      <p:sp>
-        <p:nvSpPr>
-          <p:cNvPr id="15" name="Shape 13"/>
+          <p:cNvPr id="10" name="Shape 8"/>
           <p:cNvSpPr/>
           <p:nvPr/>
         </p:nvSpPr>
         <p:spPr>
           <a:xfrm>
             <a:off x="4663440" y="1170432"/>
-            <a:ext cx="4160520" cy="1792224"/>
+            <a:ext cx="4160520" cy="1133856"/>
           </a:xfrm>
           <a:prstGeom prst="rect">
             <a:avLst/>
@@ -14378,14 +14212,14 @@
       </p:sp>
       <p:sp>
         <p:nvSpPr>
-          <p:cNvPr id="16" name="Shape 14"/>
+          <p:cNvPr id="11" name="Shape 9"/>
           <p:cNvSpPr/>
           <p:nvPr/>
         </p:nvSpPr>
         <p:spPr>
           <a:xfrm>
             <a:off x="4663440" y="1170432"/>
-            <a:ext cx="4160520" cy="402336"/>
+            <a:ext cx="54864" cy="1133856"/>
           </a:xfrm>
           <a:prstGeom prst="rect">
             <a:avLst/>
@@ -14398,71 +14232,107 @@
       </p:sp>
       <p:sp>
         <p:nvSpPr>
-          <p:cNvPr id="17" name="Text 15"/>
-          <p:cNvSpPr/>
-          <p:nvPr/>
-        </p:nvSpPr>
-        <p:spPr>
-          <a:xfrm>
-            <a:off x="4773168" y="1170432"/>
-            <a:ext cx="3941064" cy="402336"/>
-          </a:xfrm>
-          <a:prstGeom prst="rect">
-            <a:avLst/>
-          </a:prstGeom>
-          <a:noFill/>
-          <a:ln/>
-        </p:spPr>
-        <p:txBody>
-          <a:bodyPr wrap="square" lIns="0" tIns="0" rIns="0" bIns="0" rtlCol="0" anchor="ctr"/>
-          <a:lstStyle/>
-          <a:p>
-            <a:pPr indent="0" marL="0">
-              <a:buNone/>
-            </a:pPr>
-            <a:r>
-              <a:rPr lang="en-US" sz="1300" b="1" dirty="0">
-                <a:solidFill>
-                  <a:srgbClr val="FFFFFF"/>
+          <p:cNvPr id="12" name="Text 10"/>
+          <p:cNvSpPr/>
+          <p:nvPr/>
+        </p:nvSpPr>
+        <p:spPr>
+          <a:xfrm>
+            <a:off x="4809744" y="1243584"/>
+            <a:ext cx="3922776" cy="274320"/>
+          </a:xfrm>
+          <a:prstGeom prst="rect">
+            <a:avLst/>
+          </a:prstGeom>
+          <a:noFill/>
+          <a:ln/>
+        </p:spPr>
+        <p:txBody>
+          <a:bodyPr wrap="square" lIns="0" tIns="0" rIns="0" bIns="0" rtlCol="0" anchor="ctr"/>
+          <a:lstStyle/>
+          <a:p>
+            <a:pPr indent="0" marL="0">
+              <a:buNone/>
+            </a:pPr>
+            <a:r>
+              <a:rPr lang="en-US" sz="1250" b="1" dirty="0">
+                <a:solidFill>
+                  <a:srgbClr val="4A7FA8"/>
                 </a:solidFill>
               </a:rPr>
               <a:t>Test Coverage Growth</a:t>
             </a:r>
-            <a:endParaRPr lang="en-US" sz="1300" dirty="0"/>
-          </a:p>
-        </p:txBody>
-      </p:sp>
-      <p:sp>
-        <p:nvSpPr>
-          <p:cNvPr id="18" name="Text 16"/>
-          <p:cNvSpPr/>
-          <p:nvPr/>
-        </p:nvSpPr>
-        <p:spPr>
-          <a:xfrm>
-            <a:off x="4773168" y="1627632"/>
-            <a:ext cx="3941064" cy="237744"/>
-          </a:xfrm>
-          <a:prstGeom prst="rect">
-            <a:avLst/>
-          </a:prstGeom>
-          <a:noFill/>
-          <a:ln/>
-        </p:spPr>
-        <p:txBody>
-          <a:bodyPr wrap="square" lIns="0" tIns="0" rIns="0" bIns="0" rtlCol="0" anchor="ctr"/>
-          <a:lstStyle/>
-          <a:p>
-            <a:pPr indent="0" marL="0">
-              <a:buNone/>
-            </a:pPr>
-            <a:r>
-              <a:rPr lang="en-US" sz="1000" i="1" dirty="0">
+            <a:endParaRPr lang="en-US" sz="1250" dirty="0"/>
+          </a:p>
+        </p:txBody>
+      </p:sp>
+      <p:sp>
+        <p:nvSpPr>
+          <p:cNvPr id="13" name="Text 11"/>
+          <p:cNvSpPr/>
+          <p:nvPr/>
+        </p:nvSpPr>
+        <p:spPr>
+          <a:xfrm>
+            <a:off x="4809744" y="1554480"/>
+            <a:ext cx="3922776" cy="201168"/>
+          </a:xfrm>
+          <a:prstGeom prst="rect">
+            <a:avLst/>
+          </a:prstGeom>
+          <a:noFill/>
+          <a:ln/>
+        </p:spPr>
+        <p:txBody>
+          <a:bodyPr wrap="square" lIns="0" tIns="0" rIns="0" bIns="0" rtlCol="0" anchor="ctr"/>
+          <a:lstStyle/>
+          <a:p>
+            <a:pPr indent="0" marL="0">
+              <a:buNone/>
+            </a:pPr>
+            <a:r>
+              <a:rPr lang="en-US" sz="950" i="1" dirty="0">
                 <a:solidFill>
                   <a:srgbClr val="4A7FA8"/>
                 </a:solidFill>
               </a:rPr>
-              <a:t>▶ Post-merge agent run on changed files</a:t>
+              <a:t>▶ Post-merge</a:t>
+            </a:r>
+            <a:endParaRPr lang="en-US" sz="950" dirty="0"/>
+          </a:p>
+        </p:txBody>
+      </p:sp>
+      <p:sp>
+        <p:nvSpPr>
+          <p:cNvPr id="14" name="Text 12"/>
+          <p:cNvSpPr/>
+          <p:nvPr/>
+        </p:nvSpPr>
+        <p:spPr>
+          <a:xfrm>
+            <a:off x="4809744" y="1755648"/>
+            <a:ext cx="3922776" cy="512064"/>
+          </a:xfrm>
+          <a:prstGeom prst="rect">
+            <a:avLst/>
+          </a:prstGeom>
+          <a:noFill/>
+          <a:ln/>
+        </p:spPr>
+        <p:txBody>
+          <a:bodyPr wrap="square" lIns="0" tIns="0" rIns="0" bIns="0" rtlCol="0" anchor="ctr"/>
+          <a:lstStyle/>
+          <a:p>
+            <a:pPr indent="0" marL="0">
+              <a:buNone/>
+            </a:pPr>
+            <a:r>
+              <a:rPr lang="en-US" sz="1000" dirty="0">
+                <a:solidFill>
+                  <a:srgbClr val="7A90A8"/>
+                </a:solidFill>
+              </a:rPr>
+              <a:t>Identify files modified with &lt;80% coverage. Agent generates missing unit tests. Verifier confirms tests pass and are meaningful. PR opened for human review.</a:t>
             </a:r>
             <a:endParaRPr lang="en-US" sz="1000" dirty="0"/>
           </a:p>
@@ -14470,216 +14340,14 @@
       </p:sp>
       <p:sp>
         <p:nvSpPr>
-          <p:cNvPr id="19" name="Text 17"/>
-          <p:cNvSpPr/>
-          <p:nvPr/>
-        </p:nvSpPr>
-        <p:spPr>
-          <a:xfrm>
-            <a:off x="4773168" y="1883664"/>
-            <a:ext cx="3941064" cy="237744"/>
-          </a:xfrm>
-          <a:prstGeom prst="rect">
-            <a:avLst/>
-          </a:prstGeom>
-          <a:noFill/>
-          <a:ln/>
-        </p:spPr>
-        <p:txBody>
-          <a:bodyPr wrap="square" lIns="0" tIns="0" rIns="0" bIns="0" rtlCol="0" anchor="ctr"/>
-          <a:lstStyle/>
-          <a:p>
-            <a:pPr indent="0" marL="0">
-              <a:buNone/>
-            </a:pPr>
-            <a:r>
-              <a:rPr lang="en-US" sz="1050" dirty="0">
-                <a:solidFill>
-                  <a:srgbClr val="1E2D3D"/>
-                </a:solidFill>
-              </a:rPr>
-              <a:t>1. Identify files modified with &lt;80% coverage</a:t>
-            </a:r>
-            <a:endParaRPr lang="en-US" sz="1050" dirty="0"/>
-          </a:p>
-        </p:txBody>
-      </p:sp>
-      <p:sp>
-        <p:nvSpPr>
-          <p:cNvPr id="20" name="Text 18"/>
-          <p:cNvSpPr/>
-          <p:nvPr/>
-        </p:nvSpPr>
-        <p:spPr>
-          <a:xfrm>
-            <a:off x="4773168" y="2139696"/>
-            <a:ext cx="3941064" cy="237744"/>
-          </a:xfrm>
-          <a:prstGeom prst="rect">
-            <a:avLst/>
-          </a:prstGeom>
-          <a:noFill/>
-          <a:ln/>
-        </p:spPr>
-        <p:txBody>
-          <a:bodyPr wrap="square" lIns="0" tIns="0" rIns="0" bIns="0" rtlCol="0" anchor="ctr"/>
-          <a:lstStyle/>
-          <a:p>
-            <a:pPr indent="0" marL="0">
-              <a:buNone/>
-            </a:pPr>
-            <a:r>
-              <a:rPr lang="en-US" sz="1050" dirty="0">
-                <a:solidFill>
-                  <a:srgbClr val="1E2D3D"/>
-                </a:solidFill>
-              </a:rPr>
-              <a:t>2. Agent generates missing unit tests</a:t>
-            </a:r>
-            <a:endParaRPr lang="en-US" sz="1050" dirty="0"/>
-          </a:p>
-        </p:txBody>
-      </p:sp>
-      <p:sp>
-        <p:nvSpPr>
-          <p:cNvPr id="21" name="Text 19"/>
-          <p:cNvSpPr/>
-          <p:nvPr/>
-        </p:nvSpPr>
-        <p:spPr>
-          <a:xfrm>
-            <a:off x="4773168" y="2395728"/>
-            <a:ext cx="3941064" cy="237744"/>
-          </a:xfrm>
-          <a:prstGeom prst="rect">
-            <a:avLst/>
-          </a:prstGeom>
-          <a:noFill/>
-          <a:ln/>
-        </p:spPr>
-        <p:txBody>
-          <a:bodyPr wrap="square" lIns="0" tIns="0" rIns="0" bIns="0" rtlCol="0" anchor="ctr"/>
-          <a:lstStyle/>
-          <a:p>
-            <a:pPr indent="0" marL="0">
-              <a:buNone/>
-            </a:pPr>
-            <a:r>
-              <a:rPr lang="en-US" sz="1050" dirty="0">
-                <a:solidFill>
-                  <a:srgbClr val="1E2D3D"/>
-                </a:solidFill>
-              </a:rPr>
-              <a:t>3. Verifier confirms tests pass and are meaningful</a:t>
-            </a:r>
-            <a:endParaRPr lang="en-US" sz="1050" dirty="0"/>
-          </a:p>
-        </p:txBody>
-      </p:sp>
-      <p:sp>
-        <p:nvSpPr>
-          <p:cNvPr id="22" name="Text 20"/>
-          <p:cNvSpPr/>
-          <p:nvPr/>
-        </p:nvSpPr>
-        <p:spPr>
-          <a:xfrm>
-            <a:off x="4773168" y="2651760"/>
-            <a:ext cx="3941064" cy="237744"/>
-          </a:xfrm>
-          <a:prstGeom prst="rect">
-            <a:avLst/>
-          </a:prstGeom>
-          <a:noFill/>
-          <a:ln/>
-        </p:spPr>
-        <p:txBody>
-          <a:bodyPr wrap="square" lIns="0" tIns="0" rIns="0" bIns="0" rtlCol="0" anchor="ctr"/>
-          <a:lstStyle/>
-          <a:p>
-            <a:pPr indent="0" marL="0">
-              <a:buNone/>
-            </a:pPr>
-            <a:r>
-              <a:rPr lang="en-US" sz="1050" dirty="0">
-                <a:solidFill>
-                  <a:srgbClr val="1E2D3D"/>
-                </a:solidFill>
-              </a:rPr>
-              <a:t>4. PR opened for human review before merge</a:t>
-            </a:r>
-            <a:endParaRPr lang="en-US" sz="1050" dirty="0"/>
-          </a:p>
-        </p:txBody>
-      </p:sp>
-      <p:sp>
-        <p:nvSpPr>
-          <p:cNvPr id="23" name="Shape 21"/>
-          <p:cNvSpPr/>
-          <p:nvPr/>
-        </p:nvSpPr>
-        <p:spPr>
-          <a:xfrm>
-            <a:off x="4754880" y="2688336"/>
-            <a:ext cx="3977640" cy="219456"/>
-          </a:xfrm>
-          <a:prstGeom prst="rect">
-            <a:avLst/>
-          </a:prstGeom>
-          <a:solidFill>
-            <a:srgbClr val="4A7FA8">
-              <a:alpha val="12000"/>
-            </a:srgbClr>
-          </a:solidFill>
-          <a:ln/>
-        </p:spPr>
-      </p:sp>
-      <p:sp>
-        <p:nvSpPr>
-          <p:cNvPr id="24" name="Text 22"/>
-          <p:cNvSpPr/>
-          <p:nvPr/>
-        </p:nvSpPr>
-        <p:spPr>
-          <a:xfrm>
-            <a:off x="4800600" y="2688336"/>
-            <a:ext cx="3886200" cy="219456"/>
-          </a:xfrm>
-          <a:prstGeom prst="rect">
-            <a:avLst/>
-          </a:prstGeom>
-          <a:noFill/>
-          <a:ln/>
-        </p:spPr>
-        <p:txBody>
-          <a:bodyPr wrap="square" lIns="0" tIns="0" rIns="0" bIns="0" rtlCol="0" anchor="ctr"/>
-          <a:lstStyle/>
-          <a:p>
-            <a:pPr indent="0" marL="0">
-              <a:buNone/>
-            </a:pPr>
-            <a:r>
-              <a:rPr lang="en-US" sz="950" i="1" dirty="0">
-                <a:solidFill>
-                  <a:srgbClr val="4A7FA8"/>
-                </a:solidFill>
-              </a:rPr>
-              <a:t>Coverage grows organically with every feature. No dedicated ‘test debt sprints’.</a:t>
-            </a:r>
-            <a:endParaRPr lang="en-US" sz="950" dirty="0"/>
-          </a:p>
-        </p:txBody>
-      </p:sp>
-      <p:sp>
-        <p:nvSpPr>
-          <p:cNvPr id="25" name="Shape 23"/>
-          <p:cNvSpPr/>
-          <p:nvPr/>
-        </p:nvSpPr>
-        <p:spPr>
-          <a:xfrm>
-            <a:off x="320040" y="3108960"/>
-            <a:ext cx="4160520" cy="1792224"/>
+          <p:cNvPr id="15" name="Shape 13"/>
+          <p:cNvSpPr/>
+          <p:nvPr/>
+        </p:nvSpPr>
+        <p:spPr>
+          <a:xfrm>
+            <a:off x="320040" y="2414016"/>
+            <a:ext cx="4160520" cy="1133856"/>
           </a:xfrm>
           <a:prstGeom prst="rect">
             <a:avLst/>
@@ -14699,14 +14367,14 @@
       </p:sp>
       <p:sp>
         <p:nvSpPr>
-          <p:cNvPr id="26" name="Shape 24"/>
-          <p:cNvSpPr/>
-          <p:nvPr/>
-        </p:nvSpPr>
-        <p:spPr>
-          <a:xfrm>
-            <a:off x="320040" y="3108960"/>
-            <a:ext cx="4160520" cy="402336"/>
+          <p:cNvPr id="16" name="Shape 14"/>
+          <p:cNvSpPr/>
+          <p:nvPr/>
+        </p:nvSpPr>
+        <p:spPr>
+          <a:xfrm>
+            <a:off x="320040" y="2414016"/>
+            <a:ext cx="54864" cy="1133856"/>
           </a:xfrm>
           <a:prstGeom prst="rect">
             <a:avLst/>
@@ -14719,71 +14387,107 @@
       </p:sp>
       <p:sp>
         <p:nvSpPr>
-          <p:cNvPr id="27" name="Text 25"/>
-          <p:cNvSpPr/>
-          <p:nvPr/>
-        </p:nvSpPr>
-        <p:spPr>
-          <a:xfrm>
-            <a:off x="429768" y="3108960"/>
-            <a:ext cx="3941064" cy="402336"/>
-          </a:xfrm>
-          <a:prstGeom prst="rect">
-            <a:avLst/>
-          </a:prstGeom>
-          <a:noFill/>
-          <a:ln/>
-        </p:spPr>
-        <p:txBody>
-          <a:bodyPr wrap="square" lIns="0" tIns="0" rIns="0" bIns="0" rtlCol="0" anchor="ctr"/>
-          <a:lstStyle/>
-          <a:p>
-            <a:pPr indent="0" marL="0">
-              <a:buNone/>
-            </a:pPr>
-            <a:r>
-              <a:rPr lang="en-US" sz="1300" b="1" dirty="0">
-                <a:solidFill>
-                  <a:srgbClr val="FFFFFF"/>
+          <p:cNvPr id="17" name="Text 15"/>
+          <p:cNvSpPr/>
+          <p:nvPr/>
+        </p:nvSpPr>
+        <p:spPr>
+          <a:xfrm>
+            <a:off x="466344" y="2487168"/>
+            <a:ext cx="3922776" cy="274320"/>
+          </a:xfrm>
+          <a:prstGeom prst="rect">
+            <a:avLst/>
+          </a:prstGeom>
+          <a:noFill/>
+          <a:ln/>
+        </p:spPr>
+        <p:txBody>
+          <a:bodyPr wrap="square" lIns="0" tIns="0" rIns="0" bIns="0" rtlCol="0" anchor="ctr"/>
+          <a:lstStyle/>
+          <a:p>
+            <a:pPr indent="0" marL="0">
+              <a:buNone/>
+            </a:pPr>
+            <a:r>
+              <a:rPr lang="en-US" sz="1250" b="1" dirty="0">
+                <a:solidFill>
+                  <a:srgbClr val="3A7DC9"/>
                 </a:solidFill>
               </a:rPr>
               <a:t>Documentation Refresh</a:t>
             </a:r>
-            <a:endParaRPr lang="en-US" sz="1300" dirty="0"/>
-          </a:p>
-        </p:txBody>
-      </p:sp>
-      <p:sp>
-        <p:nvSpPr>
-          <p:cNvPr id="28" name="Text 26"/>
-          <p:cNvSpPr/>
-          <p:nvPr/>
-        </p:nvSpPr>
-        <p:spPr>
-          <a:xfrm>
-            <a:off x="429768" y="3566160"/>
-            <a:ext cx="3941064" cy="237744"/>
-          </a:xfrm>
-          <a:prstGeom prst="rect">
-            <a:avLst/>
-          </a:prstGeom>
-          <a:noFill/>
-          <a:ln/>
-        </p:spPr>
-        <p:txBody>
-          <a:bodyPr wrap="square" lIns="0" tIns="0" rIns="0" bIns="0" rtlCol="0" anchor="ctr"/>
-          <a:lstStyle/>
-          <a:p>
-            <a:pPr indent="0" marL="0">
-              <a:buNone/>
-            </a:pPr>
-            <a:r>
-              <a:rPr lang="en-US" sz="1000" i="1" dirty="0">
+            <a:endParaRPr lang="en-US" sz="1250" dirty="0"/>
+          </a:p>
+        </p:txBody>
+      </p:sp>
+      <p:sp>
+        <p:nvSpPr>
+          <p:cNvPr id="18" name="Text 16"/>
+          <p:cNvSpPr/>
+          <p:nvPr/>
+        </p:nvSpPr>
+        <p:spPr>
+          <a:xfrm>
+            <a:off x="466344" y="2798064"/>
+            <a:ext cx="3922776" cy="201168"/>
+          </a:xfrm>
+          <a:prstGeom prst="rect">
+            <a:avLst/>
+          </a:prstGeom>
+          <a:noFill/>
+          <a:ln/>
+        </p:spPr>
+        <p:txBody>
+          <a:bodyPr wrap="square" lIns="0" tIns="0" rIns="0" bIns="0" rtlCol="0" anchor="ctr"/>
+          <a:lstStyle/>
+          <a:p>
+            <a:pPr indent="0" marL="0">
+              <a:buNone/>
+            </a:pPr>
+            <a:r>
+              <a:rPr lang="en-US" sz="950" i="1" dirty="0">
                 <a:solidFill>
                   <a:srgbClr val="3A7DC9"/>
                 </a:solidFill>
               </a:rPr>
-              <a:t>▶ Triggered by significant PR merge</a:t>
+              <a:t>▶ On significant PR merge</a:t>
+            </a:r>
+            <a:endParaRPr lang="en-US" sz="950" dirty="0"/>
+          </a:p>
+        </p:txBody>
+      </p:sp>
+      <p:sp>
+        <p:nvSpPr>
+          <p:cNvPr id="19" name="Text 17"/>
+          <p:cNvSpPr/>
+          <p:nvPr/>
+        </p:nvSpPr>
+        <p:spPr>
+          <a:xfrm>
+            <a:off x="466344" y="2999232"/>
+            <a:ext cx="3922776" cy="512064"/>
+          </a:xfrm>
+          <a:prstGeom prst="rect">
+            <a:avLst/>
+          </a:prstGeom>
+          <a:noFill/>
+          <a:ln/>
+        </p:spPr>
+        <p:txBody>
+          <a:bodyPr wrap="square" lIns="0" tIns="0" rIns="0" bIns="0" rtlCol="0" anchor="ctr"/>
+          <a:lstStyle/>
+          <a:p>
+            <a:pPr indent="0" marL="0">
+              <a:buNone/>
+            </a:pPr>
+            <a:r>
+              <a:rPr lang="en-US" sz="1000" dirty="0">
+                <a:solidFill>
+                  <a:srgbClr val="7A90A8"/>
+                </a:solidFill>
+              </a:rPr>
+              <a:t>Agent reads diff and identifies doc gaps. Updates API docs and architecture notes. Flags PRODUCT.md sections that may be outdated. PR opened; team reviews.</a:t>
             </a:r>
             <a:endParaRPr lang="en-US" sz="1000" dirty="0"/>
           </a:p>
@@ -14791,216 +14495,14 @@
       </p:sp>
       <p:sp>
         <p:nvSpPr>
-          <p:cNvPr id="29" name="Text 27"/>
-          <p:cNvSpPr/>
-          <p:nvPr/>
-        </p:nvSpPr>
-        <p:spPr>
-          <a:xfrm>
-            <a:off x="429768" y="3822192"/>
-            <a:ext cx="3941064" cy="237744"/>
-          </a:xfrm>
-          <a:prstGeom prst="rect">
-            <a:avLst/>
-          </a:prstGeom>
-          <a:noFill/>
-          <a:ln/>
-        </p:spPr>
-        <p:txBody>
-          <a:bodyPr wrap="square" lIns="0" tIns="0" rIns="0" bIns="0" rtlCol="0" anchor="ctr"/>
-          <a:lstStyle/>
-          <a:p>
-            <a:pPr indent="0" marL="0">
-              <a:buNone/>
-            </a:pPr>
-            <a:r>
-              <a:rPr lang="en-US" sz="1050" dirty="0">
-                <a:solidFill>
-                  <a:srgbClr val="1E2D3D"/>
-                </a:solidFill>
-              </a:rPr>
-              <a:t>1. Agent reads diff and identifies doc gaps</a:t>
-            </a:r>
-            <a:endParaRPr lang="en-US" sz="1050" dirty="0"/>
-          </a:p>
-        </p:txBody>
-      </p:sp>
-      <p:sp>
-        <p:nvSpPr>
-          <p:cNvPr id="30" name="Text 28"/>
-          <p:cNvSpPr/>
-          <p:nvPr/>
-        </p:nvSpPr>
-        <p:spPr>
-          <a:xfrm>
-            <a:off x="429768" y="4078224"/>
-            <a:ext cx="3941064" cy="237744"/>
-          </a:xfrm>
-          <a:prstGeom prst="rect">
-            <a:avLst/>
-          </a:prstGeom>
-          <a:noFill/>
-          <a:ln/>
-        </p:spPr>
-        <p:txBody>
-          <a:bodyPr wrap="square" lIns="0" tIns="0" rIns="0" bIns="0" rtlCol="0" anchor="ctr"/>
-          <a:lstStyle/>
-          <a:p>
-            <a:pPr indent="0" marL="0">
-              <a:buNone/>
-            </a:pPr>
-            <a:r>
-              <a:rPr lang="en-US" sz="1050" dirty="0">
-                <a:solidFill>
-                  <a:srgbClr val="1E2D3D"/>
-                </a:solidFill>
-              </a:rPr>
-              <a:t>2. Updates API docs, README, architecture notes</a:t>
-            </a:r>
-            <a:endParaRPr lang="en-US" sz="1050" dirty="0"/>
-          </a:p>
-        </p:txBody>
-      </p:sp>
-      <p:sp>
-        <p:nvSpPr>
-          <p:cNvPr id="31" name="Text 29"/>
-          <p:cNvSpPr/>
-          <p:nvPr/>
-        </p:nvSpPr>
-        <p:spPr>
-          <a:xfrm>
-            <a:off x="429768" y="4334256"/>
-            <a:ext cx="3941064" cy="237744"/>
-          </a:xfrm>
-          <a:prstGeom prst="rect">
-            <a:avLst/>
-          </a:prstGeom>
-          <a:noFill/>
-          <a:ln/>
-        </p:spPr>
-        <p:txBody>
-          <a:bodyPr wrap="square" lIns="0" tIns="0" rIns="0" bIns="0" rtlCol="0" anchor="ctr"/>
-          <a:lstStyle/>
-          <a:p>
-            <a:pPr indent="0" marL="0">
-              <a:buNone/>
-            </a:pPr>
-            <a:r>
-              <a:rPr lang="en-US" sz="1050" dirty="0">
-                <a:solidFill>
-                  <a:srgbClr val="1E2D3D"/>
-                </a:solidFill>
-              </a:rPr>
-              <a:t>3. Flags PRODUCT.md sections that may be outdated</a:t>
-            </a:r>
-            <a:endParaRPr lang="en-US" sz="1050" dirty="0"/>
-          </a:p>
-        </p:txBody>
-      </p:sp>
-      <p:sp>
-        <p:nvSpPr>
-          <p:cNvPr id="32" name="Text 30"/>
-          <p:cNvSpPr/>
-          <p:nvPr/>
-        </p:nvSpPr>
-        <p:spPr>
-          <a:xfrm>
-            <a:off x="429768" y="4590288"/>
-            <a:ext cx="3941064" cy="237744"/>
-          </a:xfrm>
-          <a:prstGeom prst="rect">
-            <a:avLst/>
-          </a:prstGeom>
-          <a:noFill/>
-          <a:ln/>
-        </p:spPr>
-        <p:txBody>
-          <a:bodyPr wrap="square" lIns="0" tIns="0" rIns="0" bIns="0" rtlCol="0" anchor="ctr"/>
-          <a:lstStyle/>
-          <a:p>
-            <a:pPr indent="0" marL="0">
-              <a:buNone/>
-            </a:pPr>
-            <a:r>
-              <a:rPr lang="en-US" sz="1050" dirty="0">
-                <a:solidFill>
-                  <a:srgbClr val="1E2D3D"/>
-                </a:solidFill>
-              </a:rPr>
-              <a:t>4. PR opened; team reviews and merges</a:t>
-            </a:r>
-            <a:endParaRPr lang="en-US" sz="1050" dirty="0"/>
-          </a:p>
-        </p:txBody>
-      </p:sp>
-      <p:sp>
-        <p:nvSpPr>
-          <p:cNvPr id="33" name="Shape 31"/>
-          <p:cNvSpPr/>
-          <p:nvPr/>
-        </p:nvSpPr>
-        <p:spPr>
-          <a:xfrm>
-            <a:off x="411480" y="4626864"/>
-            <a:ext cx="3977640" cy="219456"/>
-          </a:xfrm>
-          <a:prstGeom prst="rect">
-            <a:avLst/>
-          </a:prstGeom>
-          <a:solidFill>
-            <a:srgbClr val="3A7DC9">
-              <a:alpha val="12000"/>
-            </a:srgbClr>
-          </a:solidFill>
-          <a:ln/>
-        </p:spPr>
-      </p:sp>
-      <p:sp>
-        <p:nvSpPr>
-          <p:cNvPr id="34" name="Text 32"/>
-          <p:cNvSpPr/>
-          <p:nvPr/>
-        </p:nvSpPr>
-        <p:spPr>
-          <a:xfrm>
-            <a:off x="457200" y="4626864"/>
-            <a:ext cx="3886200" cy="219456"/>
-          </a:xfrm>
-          <a:prstGeom prst="rect">
-            <a:avLst/>
-          </a:prstGeom>
-          <a:noFill/>
-          <a:ln/>
-        </p:spPr>
-        <p:txBody>
-          <a:bodyPr wrap="square" lIns="0" tIns="0" rIns="0" bIns="0" rtlCol="0" anchor="ctr"/>
-          <a:lstStyle/>
-          <a:p>
-            <a:pPr indent="0" marL="0">
-              <a:buNone/>
-            </a:pPr>
-            <a:r>
-              <a:rPr lang="en-US" sz="950" i="1" dirty="0">
-                <a:solidFill>
-                  <a:srgbClr val="3A7DC9"/>
-                </a:solidFill>
-              </a:rPr>
-              <a:t>Documentation stays current automatically. New team members onboard faster.</a:t>
-            </a:r>
-            <a:endParaRPr lang="en-US" sz="950" dirty="0"/>
-          </a:p>
-        </p:txBody>
-      </p:sp>
-      <p:sp>
-        <p:nvSpPr>
-          <p:cNvPr id="35" name="Shape 33"/>
-          <p:cNvSpPr/>
-          <p:nvPr/>
-        </p:nvSpPr>
-        <p:spPr>
-          <a:xfrm>
-            <a:off x="4663440" y="3108960"/>
-            <a:ext cx="4160520" cy="1792224"/>
+          <p:cNvPr id="20" name="Shape 18"/>
+          <p:cNvSpPr/>
+          <p:nvPr/>
+        </p:nvSpPr>
+        <p:spPr>
+          <a:xfrm>
+            <a:off x="4663440" y="2414016"/>
+            <a:ext cx="4160520" cy="1133856"/>
           </a:xfrm>
           <a:prstGeom prst="rect">
             <a:avLst/>
@@ -15020,14 +14522,14 @@
       </p:sp>
       <p:sp>
         <p:nvSpPr>
-          <p:cNvPr id="36" name="Shape 34"/>
-          <p:cNvSpPr/>
-          <p:nvPr/>
-        </p:nvSpPr>
-        <p:spPr>
-          <a:xfrm>
-            <a:off x="4663440" y="3108960"/>
-            <a:ext cx="4160520" cy="402336"/>
+          <p:cNvPr id="21" name="Shape 19"/>
+          <p:cNvSpPr/>
+          <p:nvPr/>
+        </p:nvSpPr>
+        <p:spPr>
+          <a:xfrm>
+            <a:off x="4663440" y="2414016"/>
+            <a:ext cx="54864" cy="1133856"/>
           </a:xfrm>
           <a:prstGeom prst="rect">
             <a:avLst/>
@@ -15040,71 +14542,107 @@
       </p:sp>
       <p:sp>
         <p:nvSpPr>
-          <p:cNvPr id="37" name="Text 35"/>
-          <p:cNvSpPr/>
-          <p:nvPr/>
-        </p:nvSpPr>
-        <p:spPr>
-          <a:xfrm>
-            <a:off x="4773168" y="3108960"/>
-            <a:ext cx="3941064" cy="402336"/>
-          </a:xfrm>
-          <a:prstGeom prst="rect">
-            <a:avLst/>
-          </a:prstGeom>
-          <a:noFill/>
-          <a:ln/>
-        </p:spPr>
-        <p:txBody>
-          <a:bodyPr wrap="square" lIns="0" tIns="0" rIns="0" bIns="0" rtlCol="0" anchor="ctr"/>
-          <a:lstStyle/>
-          <a:p>
-            <a:pPr indent="0" marL="0">
-              <a:buNone/>
-            </a:pPr>
-            <a:r>
-              <a:rPr lang="en-US" sz="1300" b="1" dirty="0">
-                <a:solidFill>
-                  <a:srgbClr val="FFFFFF"/>
+          <p:cNvPr id="22" name="Text 20"/>
+          <p:cNvSpPr/>
+          <p:nvPr/>
+        </p:nvSpPr>
+        <p:spPr>
+          <a:xfrm>
+            <a:off x="4809744" y="2487168"/>
+            <a:ext cx="3922776" cy="274320"/>
+          </a:xfrm>
+          <a:prstGeom prst="rect">
+            <a:avLst/>
+          </a:prstGeom>
+          <a:noFill/>
+          <a:ln/>
+        </p:spPr>
+        <p:txBody>
+          <a:bodyPr wrap="square" lIns="0" tIns="0" rIns="0" bIns="0" rtlCol="0" anchor="ctr"/>
+          <a:lstStyle/>
+          <a:p>
+            <a:pPr indent="0" marL="0">
+              <a:buNone/>
+            </a:pPr>
+            <a:r>
+              <a:rPr lang="en-US" sz="1250" b="1" dirty="0">
+                <a:solidFill>
+                  <a:srgbClr val="3A7E6E"/>
                 </a:solidFill>
               </a:rPr>
               <a:t>Code Quality Enforcement</a:t>
             </a:r>
-            <a:endParaRPr lang="en-US" sz="1300" dirty="0"/>
-          </a:p>
-        </p:txBody>
-      </p:sp>
-      <p:sp>
-        <p:nvSpPr>
-          <p:cNvPr id="38" name="Text 36"/>
-          <p:cNvSpPr/>
-          <p:nvPr/>
-        </p:nvSpPr>
-        <p:spPr>
-          <a:xfrm>
-            <a:off x="4773168" y="3566160"/>
-            <a:ext cx="3941064" cy="237744"/>
-          </a:xfrm>
-          <a:prstGeom prst="rect">
-            <a:avLst/>
-          </a:prstGeom>
-          <a:noFill/>
-          <a:ln/>
-        </p:spPr>
-        <p:txBody>
-          <a:bodyPr wrap="square" lIns="0" tIns="0" rIns="0" bIns="0" rtlCol="0" anchor="ctr"/>
-          <a:lstStyle/>
-          <a:p>
-            <a:pPr indent="0" marL="0">
-              <a:buNone/>
-            </a:pPr>
-            <a:r>
-              <a:rPr lang="en-US" sz="1000" i="1" dirty="0">
+            <a:endParaRPr lang="en-US" sz="1250" dirty="0"/>
+          </a:p>
+        </p:txBody>
+      </p:sp>
+      <p:sp>
+        <p:nvSpPr>
+          <p:cNvPr id="23" name="Text 21"/>
+          <p:cNvSpPr/>
+          <p:nvPr/>
+        </p:nvSpPr>
+        <p:spPr>
+          <a:xfrm>
+            <a:off x="4809744" y="2798064"/>
+            <a:ext cx="3922776" cy="201168"/>
+          </a:xfrm>
+          <a:prstGeom prst="rect">
+            <a:avLst/>
+          </a:prstGeom>
+          <a:noFill/>
+          <a:ln/>
+        </p:spPr>
+        <p:txBody>
+          <a:bodyPr wrap="square" lIns="0" tIns="0" rIns="0" bIns="0" rtlCol="0" anchor="ctr"/>
+          <a:lstStyle/>
+          <a:p>
+            <a:pPr indent="0" marL="0">
+              <a:buNone/>
+            </a:pPr>
+            <a:r>
+              <a:rPr lang="en-US" sz="950" i="1" dirty="0">
                 <a:solidFill>
                   <a:srgbClr val="3A7E6E"/>
                 </a:solidFill>
               </a:rPr>
-              <a:t>▶ Pre-PR agent hook</a:t>
+              <a:t>▶ Pre-PR hook</a:t>
+            </a:r>
+            <a:endParaRPr lang="en-US" sz="950" dirty="0"/>
+          </a:p>
+        </p:txBody>
+      </p:sp>
+      <p:sp>
+        <p:nvSpPr>
+          <p:cNvPr id="24" name="Text 22"/>
+          <p:cNvSpPr/>
+          <p:nvPr/>
+        </p:nvSpPr>
+        <p:spPr>
+          <a:xfrm>
+            <a:off x="4809744" y="2999232"/>
+            <a:ext cx="3922776" cy="512064"/>
+          </a:xfrm>
+          <a:prstGeom prst="rect">
+            <a:avLst/>
+          </a:prstGeom>
+          <a:noFill/>
+          <a:ln/>
+        </p:spPr>
+        <p:txBody>
+          <a:bodyPr wrap="square" lIns="0" tIns="0" rIns="0" bIns="0" rtlCol="0" anchor="ctr"/>
+          <a:lstStyle/>
+          <a:p>
+            <a:pPr indent="0" marL="0">
+              <a:buNone/>
+            </a:pPr>
+            <a:r>
+              <a:rPr lang="en-US" sz="1000" dirty="0">
+                <a:solidFill>
+                  <a:srgbClr val="7A90A8"/>
+                </a:solidFill>
+              </a:rPr>
+              <a:t>Linter, formatter, type checker, complexity check, security pattern check. Agent self-corrects formatting issues before the human sees the diff.</a:t>
             </a:r>
             <a:endParaRPr lang="en-US" sz="1000" dirty="0"/>
           </a:p>
@@ -15112,180 +14650,97 @@
       </p:sp>
       <p:sp>
         <p:nvSpPr>
-          <p:cNvPr id="39" name="Text 37"/>
-          <p:cNvSpPr/>
-          <p:nvPr/>
-        </p:nvSpPr>
-        <p:spPr>
-          <a:xfrm>
-            <a:off x="4773168" y="3822192"/>
-            <a:ext cx="3941064" cy="237744"/>
-          </a:xfrm>
-          <a:prstGeom prst="rect">
-            <a:avLst/>
-          </a:prstGeom>
-          <a:noFill/>
-          <a:ln/>
-        </p:spPr>
-        <p:txBody>
-          <a:bodyPr wrap="square" lIns="0" tIns="0" rIns="0" bIns="0" rtlCol="0" anchor="ctr"/>
-          <a:lstStyle/>
-          <a:p>
-            <a:pPr indent="0" marL="0">
-              <a:buNone/>
-            </a:pPr>
-            <a:r>
-              <a:rPr lang="en-US" sz="1050" dirty="0">
-                <a:solidFill>
-                  <a:srgbClr val="1E2D3D"/>
-                </a:solidFill>
-              </a:rPr>
-              <a:t>1. Linter, formatter, and type checker run</a:t>
-            </a:r>
-            <a:endParaRPr lang="en-US" sz="1050" dirty="0"/>
-          </a:p>
-        </p:txBody>
-      </p:sp>
-      <p:sp>
-        <p:nvSpPr>
-          <p:cNvPr id="40" name="Text 38"/>
-          <p:cNvSpPr/>
-          <p:nvPr/>
-        </p:nvSpPr>
-        <p:spPr>
-          <a:xfrm>
-            <a:off x="4773168" y="4078224"/>
-            <a:ext cx="3941064" cy="237744"/>
-          </a:xfrm>
-          <a:prstGeom prst="rect">
-            <a:avLst/>
-          </a:prstGeom>
-          <a:noFill/>
-          <a:ln/>
-        </p:spPr>
-        <p:txBody>
-          <a:bodyPr wrap="square" lIns="0" tIns="0" rIns="0" bIns="0" rtlCol="0" anchor="ctr"/>
-          <a:lstStyle/>
-          <a:p>
-            <a:pPr indent="0" marL="0">
-              <a:buNone/>
-            </a:pPr>
-            <a:r>
-              <a:rPr lang="en-US" sz="1050" dirty="0">
-                <a:solidFill>
-                  <a:srgbClr val="1E2D3D"/>
-                </a:solidFill>
-              </a:rPr>
-              <a:t>2. Agent self-corrects formatting issues</a:t>
-            </a:r>
-            <a:endParaRPr lang="en-US" sz="1050" dirty="0"/>
-          </a:p>
-        </p:txBody>
-      </p:sp>
-      <p:sp>
-        <p:nvSpPr>
-          <p:cNvPr id="41" name="Text 39"/>
-          <p:cNvSpPr/>
-          <p:nvPr/>
-        </p:nvSpPr>
-        <p:spPr>
-          <a:xfrm>
-            <a:off x="4773168" y="4334256"/>
-            <a:ext cx="3941064" cy="237744"/>
-          </a:xfrm>
-          <a:prstGeom prst="rect">
-            <a:avLst/>
-          </a:prstGeom>
-          <a:noFill/>
-          <a:ln/>
-        </p:spPr>
-        <p:txBody>
-          <a:bodyPr wrap="square" lIns="0" tIns="0" rIns="0" bIns="0" rtlCol="0" anchor="ctr"/>
-          <a:lstStyle/>
-          <a:p>
-            <a:pPr indent="0" marL="0">
-              <a:buNone/>
-            </a:pPr>
-            <a:r>
-              <a:rPr lang="en-US" sz="1050" dirty="0">
-                <a:solidFill>
-                  <a:srgbClr val="1E2D3D"/>
-                </a:solidFill>
-              </a:rPr>
-              <a:t>3. Complexity check: flags methods above threshold</a:t>
-            </a:r>
-            <a:endParaRPr lang="en-US" sz="1050" dirty="0"/>
-          </a:p>
-        </p:txBody>
-      </p:sp>
-      <p:sp>
-        <p:nvSpPr>
-          <p:cNvPr id="42" name="Text 40"/>
-          <p:cNvSpPr/>
-          <p:nvPr/>
-        </p:nvSpPr>
-        <p:spPr>
-          <a:xfrm>
-            <a:off x="4773168" y="4590288"/>
-            <a:ext cx="3941064" cy="237744"/>
-          </a:xfrm>
-          <a:prstGeom prst="rect">
-            <a:avLst/>
-          </a:prstGeom>
-          <a:noFill/>
-          <a:ln/>
-        </p:spPr>
-        <p:txBody>
-          <a:bodyPr wrap="square" lIns="0" tIns="0" rIns="0" bIns="0" rtlCol="0" anchor="ctr"/>
-          <a:lstStyle/>
-          <a:p>
-            <a:pPr indent="0" marL="0">
-              <a:buNone/>
-            </a:pPr>
-            <a:r>
-              <a:rPr lang="en-US" sz="1050" dirty="0">
-                <a:solidFill>
-                  <a:srgbClr val="1E2D3D"/>
-                </a:solidFill>
-              </a:rPr>
-              <a:t>4. Security pattern check (OWASP patterns)</a:t>
-            </a:r>
-            <a:endParaRPr lang="en-US" sz="1050" dirty="0"/>
-          </a:p>
-        </p:txBody>
-      </p:sp>
-      <p:sp>
-        <p:nvSpPr>
-          <p:cNvPr id="43" name="Shape 41"/>
-          <p:cNvSpPr/>
-          <p:nvPr/>
-        </p:nvSpPr>
-        <p:spPr>
-          <a:xfrm>
-            <a:off x="4754880" y="4626864"/>
-            <a:ext cx="3977640" cy="219456"/>
-          </a:xfrm>
-          <a:prstGeom prst="rect">
-            <a:avLst/>
-          </a:prstGeom>
-          <a:solidFill>
-            <a:srgbClr val="3A7E6E">
-              <a:alpha val="12000"/>
-            </a:srgbClr>
-          </a:solidFill>
-          <a:ln/>
-        </p:spPr>
-      </p:sp>
-      <p:sp>
-        <p:nvSpPr>
-          <p:cNvPr id="44" name="Text 42"/>
-          <p:cNvSpPr/>
-          <p:nvPr/>
-        </p:nvSpPr>
-        <p:spPr>
-          <a:xfrm>
-            <a:off x="4800600" y="4626864"/>
-            <a:ext cx="3886200" cy="219456"/>
+          <p:cNvPr id="25" name="Shape 23"/>
+          <p:cNvSpPr/>
+          <p:nvPr/>
+        </p:nvSpPr>
+        <p:spPr>
+          <a:xfrm>
+            <a:off x="320040" y="3657600"/>
+            <a:ext cx="4160520" cy="1133856"/>
+          </a:xfrm>
+          <a:prstGeom prst="rect">
+            <a:avLst/>
+          </a:prstGeom>
+          <a:solidFill>
+            <a:srgbClr val="F3F6F9"/>
+          </a:solidFill>
+          <a:ln/>
+          <a:effectLst>
+            <a:outerShdw sx="100000" sy="100000" kx="0" ky="0" algn="bl" rotWithShape="0" blurRad="101600" dist="38100" dir="8100000">
+              <a:srgbClr val="000000">
+                <a:alpha val="13000"/>
+              </a:srgbClr>
+            </a:outerShdw>
+          </a:effectLst>
+        </p:spPr>
+      </p:sp>
+      <p:sp>
+        <p:nvSpPr>
+          <p:cNvPr id="26" name="Shape 24"/>
+          <p:cNvSpPr/>
+          <p:nvPr/>
+        </p:nvSpPr>
+        <p:spPr>
+          <a:xfrm>
+            <a:off x="320040" y="3657600"/>
+            <a:ext cx="54864" cy="1133856"/>
+          </a:xfrm>
+          <a:prstGeom prst="rect">
+            <a:avLst/>
+          </a:prstGeom>
+          <a:solidFill>
+            <a:srgbClr val="8096B0"/>
+          </a:solidFill>
+          <a:ln/>
+        </p:spPr>
+      </p:sp>
+      <p:sp>
+        <p:nvSpPr>
+          <p:cNvPr id="27" name="Text 25"/>
+          <p:cNvSpPr/>
+          <p:nvPr/>
+        </p:nvSpPr>
+        <p:spPr>
+          <a:xfrm>
+            <a:off x="466344" y="3730752"/>
+            <a:ext cx="3922776" cy="274320"/>
+          </a:xfrm>
+          <a:prstGeom prst="rect">
+            <a:avLst/>
+          </a:prstGeom>
+          <a:noFill/>
+          <a:ln/>
+        </p:spPr>
+        <p:txBody>
+          <a:bodyPr wrap="square" lIns="0" tIns="0" rIns="0" bIns="0" rtlCol="0" anchor="ctr"/>
+          <a:lstStyle/>
+          <a:p>
+            <a:pPr indent="0" marL="0">
+              <a:buNone/>
+            </a:pPr>
+            <a:r>
+              <a:rPr lang="en-US" sz="1250" b="1" dirty="0">
+                <a:solidFill>
+                  <a:srgbClr val="8096B0"/>
+                </a:solidFill>
+              </a:rPr>
+              <a:t>Design &amp; Artefact Review</a:t>
+            </a:r>
+            <a:endParaRPr lang="en-US" sz="1250" dirty="0"/>
+          </a:p>
+        </p:txBody>
+      </p:sp>
+      <p:sp>
+        <p:nvSpPr>
+          <p:cNvPr id="28" name="Text 26"/>
+          <p:cNvSpPr/>
+          <p:nvPr/>
+        </p:nvSpPr>
+        <p:spPr>
+          <a:xfrm>
+            <a:off x="466344" y="4041648"/>
+            <a:ext cx="3922776" cy="201168"/>
           </a:xfrm>
           <a:prstGeom prst="rect">
             <a:avLst/>
@@ -15303,12 +14758,203 @@
             <a:r>
               <a:rPr lang="en-US" sz="950" i="1" dirty="0">
                 <a:solidFill>
-                  <a:srgbClr val="3A7E6E"/>
-                </a:solidFill>
-              </a:rPr>
-              <a:t>Code review focuses on architecture and logic, not style or basic quality.</a:t>
+                  <a:srgbClr val="8096B0"/>
+                </a:solidFill>
+              </a:rPr>
+              <a:t>▶ Before human review</a:t>
             </a:r>
             <a:endParaRPr lang="en-US" sz="950" dirty="0"/>
+          </a:p>
+        </p:txBody>
+      </p:sp>
+      <p:sp>
+        <p:nvSpPr>
+          <p:cNvPr id="29" name="Text 27"/>
+          <p:cNvSpPr/>
+          <p:nvPr/>
+        </p:nvSpPr>
+        <p:spPr>
+          <a:xfrm>
+            <a:off x="466344" y="4242816"/>
+            <a:ext cx="3922776" cy="512064"/>
+          </a:xfrm>
+          <a:prstGeom prst="rect">
+            <a:avLst/>
+          </a:prstGeom>
+          <a:noFill/>
+          <a:ln/>
+        </p:spPr>
+        <p:txBody>
+          <a:bodyPr wrap="square" lIns="0" tIns="0" rIns="0" bIns="0" rtlCol="0" anchor="ctr"/>
+          <a:lstStyle/>
+          <a:p>
+            <a:pPr indent="0" marL="0">
+              <a:buNone/>
+            </a:pPr>
+            <a:r>
+              <a:rPr lang="en-US" sz="1000" dirty="0">
+                <a:solidFill>
+                  <a:srgbClr val="7A90A8"/>
+                </a:solidFill>
+              </a:rPr>
+              <a:t>Agent reads the proposal alongside the codebase and flags: conflicts with existing architecture, missing edge cases, undefined NFRs, ADR violations. Humans review with findings already surfaced.</a:t>
+            </a:r>
+            <a:endParaRPr lang="en-US" sz="1000" dirty="0"/>
+          </a:p>
+        </p:txBody>
+      </p:sp>
+      <p:sp>
+        <p:nvSpPr>
+          <p:cNvPr id="30" name="Shape 28"/>
+          <p:cNvSpPr/>
+          <p:nvPr/>
+        </p:nvSpPr>
+        <p:spPr>
+          <a:xfrm>
+            <a:off x="4663440" y="3657600"/>
+            <a:ext cx="4160520" cy="1133856"/>
+          </a:xfrm>
+          <a:prstGeom prst="rect">
+            <a:avLst/>
+          </a:prstGeom>
+          <a:solidFill>
+            <a:srgbClr val="F3F6F9"/>
+          </a:solidFill>
+          <a:ln/>
+          <a:effectLst>
+            <a:outerShdw sx="100000" sy="100000" kx="0" ky="0" algn="bl" rotWithShape="0" blurRad="101600" dist="38100" dir="8100000">
+              <a:srgbClr val="000000">
+                <a:alpha val="13000"/>
+              </a:srgbClr>
+            </a:outerShdw>
+          </a:effectLst>
+        </p:spPr>
+      </p:sp>
+      <p:sp>
+        <p:nvSpPr>
+          <p:cNvPr id="31" name="Shape 29"/>
+          <p:cNvSpPr/>
+          <p:nvPr/>
+        </p:nvSpPr>
+        <p:spPr>
+          <a:xfrm>
+            <a:off x="4663440" y="3657600"/>
+            <a:ext cx="54864" cy="1133856"/>
+          </a:xfrm>
+          <a:prstGeom prst="rect">
+            <a:avLst/>
+          </a:prstGeom>
+          <a:solidFill>
+            <a:srgbClr val="B87820"/>
+          </a:solidFill>
+          <a:ln/>
+        </p:spPr>
+      </p:sp>
+      <p:sp>
+        <p:nvSpPr>
+          <p:cNvPr id="32" name="Text 30"/>
+          <p:cNvSpPr/>
+          <p:nvPr/>
+        </p:nvSpPr>
+        <p:spPr>
+          <a:xfrm>
+            <a:off x="4809744" y="3730752"/>
+            <a:ext cx="3922776" cy="274320"/>
+          </a:xfrm>
+          <a:prstGeom prst="rect">
+            <a:avLst/>
+          </a:prstGeom>
+          <a:noFill/>
+          <a:ln/>
+        </p:spPr>
+        <p:txBody>
+          <a:bodyPr wrap="square" lIns="0" tIns="0" rIns="0" bIns="0" rtlCol="0" anchor="ctr"/>
+          <a:lstStyle/>
+          <a:p>
+            <a:pPr indent="0" marL="0">
+              <a:buNone/>
+            </a:pPr>
+            <a:r>
+              <a:rPr lang="en-US" sz="1250" b="1" dirty="0">
+                <a:solidFill>
+                  <a:srgbClr val="B87820"/>
+                </a:solidFill>
+              </a:rPr>
+              <a:t>Team Education &amp; Onboarding</a:t>
+            </a:r>
+            <a:endParaRPr lang="en-US" sz="1250" dirty="0"/>
+          </a:p>
+        </p:txBody>
+      </p:sp>
+      <p:sp>
+        <p:nvSpPr>
+          <p:cNvPr id="33" name="Text 31"/>
+          <p:cNvSpPr/>
+          <p:nvPr/>
+        </p:nvSpPr>
+        <p:spPr>
+          <a:xfrm>
+            <a:off x="4809744" y="4041648"/>
+            <a:ext cx="3922776" cy="201168"/>
+          </a:xfrm>
+          <a:prstGeom prst="rect">
+            <a:avLst/>
+          </a:prstGeom>
+          <a:noFill/>
+          <a:ln/>
+        </p:spPr>
+        <p:txBody>
+          <a:bodyPr wrap="square" lIns="0" tIns="0" rIns="0" bIns="0" rtlCol="0" anchor="ctr"/>
+          <a:lstStyle/>
+          <a:p>
+            <a:pPr indent="0" marL="0">
+              <a:buNone/>
+            </a:pPr>
+            <a:r>
+              <a:rPr lang="en-US" sz="950" i="1" dirty="0">
+                <a:solidFill>
+                  <a:srgbClr val="B87820"/>
+                </a:solidFill>
+              </a:rPr>
+              <a:t>▶ On-demand / new team member</a:t>
+            </a:r>
+            <a:endParaRPr lang="en-US" sz="950" dirty="0"/>
+          </a:p>
+        </p:txBody>
+      </p:sp>
+      <p:sp>
+        <p:nvSpPr>
+          <p:cNvPr id="34" name="Text 32"/>
+          <p:cNvSpPr/>
+          <p:nvPr/>
+        </p:nvSpPr>
+        <p:spPr>
+          <a:xfrm>
+            <a:off x="4809744" y="4242816"/>
+            <a:ext cx="3922776" cy="512064"/>
+          </a:xfrm>
+          <a:prstGeom prst="rect">
+            <a:avLst/>
+          </a:prstGeom>
+          <a:noFill/>
+          <a:ln/>
+        </p:spPr>
+        <p:txBody>
+          <a:bodyPr wrap="square" lIns="0" tIns="0" rIns="0" bIns="0" rtlCol="0" anchor="ctr"/>
+          <a:lstStyle/>
+          <a:p>
+            <a:pPr indent="0" marL="0">
+              <a:buNone/>
+            </a:pPr>
+            <a:r>
+              <a:rPr lang="en-US" sz="1000" dirty="0">
+                <a:solidFill>
+                  <a:srgbClr val="7A90A8"/>
+                </a:solidFill>
+              </a:rPr>
+              <a:t>New members use Claude Code to understand the codebase without interrupting senior developers. Encode starting questions in CLAUDE.md: “Read PRODUCT.md and the adr/ folder. Explain the three most important architectural constraints and why they exist.”</a:t>
+            </a:r>
+            <a:endParaRPr lang="en-US" sz="1000" dirty="0"/>
           </a:p>
         </p:txBody>
       </p:sp>

--- a/slides/Module_11_Product_First.pptx
+++ b/slides/Module_11_Product_First.pptx
@@ -5653,7 +5653,7 @@
                   <a:srgbClr val="FFFFFF"/>
                 </a:solidFill>
               </a:rPr>
-              <a:t>This is the most important mental model change in the programme. Everything else depends on it.</a:t>
+              <a:t>This is the most important mental model change in the program. Everything else depends on it.</a:t>
             </a:r>
             <a:endParaRPr lang="en-US" sz="1500" dirty="0"/>
           </a:p>
@@ -8636,7 +8636,7 @@
                   <a:srgbClr val="3A7E6E"/>
                 </a:solidFill>
               </a:rPr>
-              <a:t>Agent: Agents that understand business context prioritise correctly and avoid building features that conflict with strategy.</a:t>
+              <a:t>Agent: Agents that understand business context prioritize correctly and avoid building features that conflict with strategy.</a:t>
             </a:r>
             <a:endParaRPr lang="en-US" sz="950" dirty="0"/>
           </a:p>
@@ -14725,7 +14725,7 @@
                   <a:srgbClr val="8096B0"/>
                 </a:solidFill>
               </a:rPr>
-              <a:t>Design &amp; Artefact Review</a:t>
+              <a:t>Design &amp; Artifact Review</a:t>
             </a:r>
             <a:endParaRPr lang="en-US" sz="1250" dirty="0"/>
           </a:p>
